--- a/docs/slides/AGJ_update_2026-08-18.pptx
+++ b/docs/slides/AGJ_update_2026-08-18.pptx
@@ -25,6 +25,7 @@
     <p:sldId id="273" r:id="rId24"/>
     <p:sldId id="274" r:id="rId25"/>
     <p:sldId id="275" r:id="rId26"/>
+    <p:sldId id="276" r:id="rId27"/>
   </p:sldIdLst>
   <p:sldSz cx="12191695" cy="6858000" type="screen4x3"/>
   <p:notesSz cx="6858000" cy="9144000"/>
@@ -3646,7 +3647,7 @@
                 </a:solidFill>
                 <a:latin typeface="Hiragino Sans"/>
               </a:rPr>
-              <a:t>01 / 20   出典付き・帳簿駆動・全再現可能(regenerate_all)</a:t>
+              <a:t>01 / 21   出典付き・帳簿駆動・全再現可能(regenerate_all)</a:t>
             </a:r>
           </a:p>
         </p:txBody>
@@ -4150,7 +4151,7 @@
                 </a:solidFill>
                 <a:latin typeface="Hiragino Sans"/>
               </a:rPr>
-              <a:t>10 / 20   再現: PYTHONPATH=. python3 scripts/gen_swing_map.py</a:t>
+              <a:t>10 / 21   再現: PYTHONPATH=. python3 scripts/gen_swing_map.py</a:t>
             </a:r>
           </a:p>
         </p:txBody>
@@ -4552,7 +4553,7 @@
                 </a:solidFill>
                 <a:latin typeface="Hiragino Sans"/>
               </a:rPr>
-              <a:t>11 / 20   route_disclosure_edges.py / apply_disclosure_v2.py</a:t>
+              <a:t>11 / 21   route_disclosure_edges.py / apply_disclosure_v2.py</a:t>
             </a:r>
           </a:p>
         </p:txBody>
@@ -4873,7 +4874,7 @@
                 </a:solidFill>
                 <a:latin typeface="Hiragino Sans"/>
               </a:rPr>
-              <a:t>12 / 20   docs/MODEL_INTERVENTIONS.md — 「盲信につながる修正は全部ここに載せる」</a:t>
+              <a:t>12 / 21   docs/MODEL_INTERVENTIONS.md — 「盲信につながる修正は全部ここに載せる」</a:t>
             </a:r>
           </a:p>
         </p:txBody>
@@ -5551,7 +5552,7 @@
                 </a:solidFill>
                 <a:latin typeface="Hiragino Sans"/>
               </a:rPr>
-              <a:t>13 / 20   ZIP負荷: P(V)=P₀(aV²+bV+c)</a:t>
+              <a:t>13 / 21   ZIP負荷: P(V)=P₀(aV²+bV+c)</a:t>
             </a:r>
           </a:p>
         </p:txBody>
@@ -6162,7 +6163,7 @@
                 </a:solidFill>
                 <a:latin typeface="Hiragino Sans"/>
               </a:rPr>
-              <a:t>14 / 20   先例: FNET/GridEye(米)。日本の分散PMU網は未開拓</a:t>
+              <a:t>14 / 21   先例: FNET/GridEye(米)。日本の分散PMU網は未開拓</a:t>
             </a:r>
           </a:p>
         </p:txBody>
@@ -6708,7 +6709,7 @@
                 </a:solidFill>
                 <a:latin typeface="Hiragino Sans"/>
               </a:rPr>
-              <a:t>15 / 20   All-Japan-Grid 動的検証キャンペーン 2026-08</a:t>
+              <a:t>15 / 21   All-Japan-Grid 動的検証キャンペーン 2026-08</a:t>
             </a:r>
           </a:p>
         </p:txBody>
@@ -7014,7 +7015,7 @@
                 </a:solidFill>
                 <a:latin typeface="Hiragino Sans"/>
               </a:rPr>
-              <a:t>16 / 20   lutelute.github.io/All-Japan-Grid/flow_map.html</a:t>
+              <a:t>16 / 21   lutelute.github.io/All-Japan-Grid/flow_map.html</a:t>
             </a:r>
           </a:p>
         </p:txBody>
@@ -7320,7 +7321,7 @@
                 </a:solidFill>
                 <a:latin typeface="Hiragino Sans"/>
               </a:rPr>
-              <a:t>17 / 20   fetch_denkiyoho.py → export_flow_map_data --realtime</a:t>
+              <a:t>17 / 21   fetch_denkiyoho.py → export_flow_map_data --realtime</a:t>
             </a:r>
           </a:p>
         </p:txBody>
@@ -7594,7 +7595,7 @@
                 </a:solidFill>
                 <a:latin typeface="Hiragino Sans"/>
               </a:rPr>
-              <a:t>18 / 20   円周ゲージ=出力/定格</a:t>
+              <a:t>18 / 21   円周ゲージ=出力/定格</a:t>
             </a:r>
           </a:p>
         </p:txBody>
@@ -7900,7 +7901,7 @@
                 </a:solidFill>
                 <a:latin typeface="Hiragino Sans"/>
               </a:rPr>
-              <a:t>19 / 20   tie_duplication_audit_2026-08-17.md</a:t>
+              <a:t>19 / 21   tie_duplication_audit_2026-08-17.md</a:t>
             </a:r>
           </a:p>
         </p:txBody>
@@ -8447,7 +8448,7 @@
                 </a:solidFill>
                 <a:latin typeface="Hiragino Sans"/>
               </a:rPr>
-              <a:t>02 / 20   Yはpandapower/pypower makeYbus(業界標準実装)・出荷v5.0.1</a:t>
+              <a:t>02 / 21   Yはpandapower/pypower makeYbus(業界標準実装)・出荷v5.0.1</a:t>
             </a:r>
           </a:p>
         </p:txBody>
@@ -8753,7 +8754,329 @@
                 </a:solidFill>
                 <a:latin typeface="Hiragino Sans"/>
               </a:rPr>
-              <a:t>20 / 20   rei_conflation_plan_2026-08-17.md</a:t>
+              <a:t>20 / 21   rei_conflation_plan_2026-08-17.md</a:t>
+            </a:r>
+          </a:p>
+        </p:txBody>
+      </p:sp>
+    </p:spTree>
+  </p:cSld>
+  <p:clrMapOvr>
+    <a:masterClrMapping/>
+  </p:clrMapOvr>
+</p:sld>
+</file>
+
+<file path=ppt/slides/slide21.xml><?xml version="1.0" encoding="utf-8"?>
+<p:sld xmlns:a="http://schemas.openxmlformats.org/drawingml/2006/main" xmlns:p="http://schemas.openxmlformats.org/presentationml/2006/main" xmlns:r="http://schemas.openxmlformats.org/officeDocument/2006/relationships">
+  <p:cSld>
+    <p:spTree>
+      <p:nvGrpSpPr>
+        <p:cNvPr id="1" name=""/>
+        <p:cNvGrpSpPr/>
+        <p:nvPr/>
+      </p:nvGrpSpPr>
+      <p:grpSpPr/>
+      <p:sp>
+        <p:nvSpPr>
+          <p:cNvPr id="2" name="Rectangle 1"/>
+          <p:cNvSpPr/>
+          <p:nvPr/>
+        </p:nvSpPr>
+        <p:spPr>
+          <a:xfrm>
+            <a:off x="0" y="0"/>
+            <a:ext cx="12191695" cy="6858000"/>
+          </a:xfrm>
+          <a:prstGeom prst="rect">
+            <a:avLst/>
+          </a:prstGeom>
+          <a:solidFill>
+            <a:srgbClr val="0F1620"/>
+          </a:solidFill>
+          <a:ln>
+            <a:noFill/>
+          </a:ln>
+          <a:effectLst/>
+        </p:spPr>
+        <p:style>
+          <a:lnRef idx="1">
+            <a:schemeClr val="accent1"/>
+          </a:lnRef>
+          <a:fillRef idx="3">
+            <a:schemeClr val="accent1"/>
+          </a:fillRef>
+          <a:effectRef idx="2">
+            <a:schemeClr val="accent1"/>
+          </a:effectRef>
+          <a:fontRef idx="minor">
+            <a:schemeClr val="lt1"/>
+          </a:fontRef>
+        </p:style>
+        <p:txBody>
+          <a:bodyPr rtlCol="0" anchor="ctr"/>
+          <a:lstStyle/>
+          <a:p>
+            <a:pPr algn="ctr"/>
+          </a:p>
+        </p:txBody>
+      </p:sp>
+      <p:sp>
+        <p:nvSpPr>
+          <p:cNvPr id="3" name="TextBox 2"/>
+          <p:cNvSpPr txBox="1"/>
+          <p:nvPr/>
+        </p:nvSpPr>
+        <p:spPr>
+          <a:xfrm>
+            <a:off x="548640" y="292608"/>
+            <a:ext cx="10972800" cy="365760"/>
+          </a:xfrm>
+          <a:prstGeom prst="rect">
+            <a:avLst/>
+          </a:prstGeom>
+          <a:noFill/>
+        </p:spPr>
+        <p:txBody>
+          <a:bodyPr wrap="square">
+            <a:spAutoFit/>
+          </a:bodyPr>
+          <a:lstStyle/>
+          <a:p>
+            <a:pPr algn="l">
+              <a:lnSpc>
+                <a:spcPct val="125000"/>
+              </a:lnSpc>
+            </a:pPr>
+            <a:r>
+              <a:rPr sz="1300" b="1">
+                <a:solidFill>
+                  <a:srgbClr val="E0A13A"/>
+                </a:solidFill>
+                <a:latin typeface="Hiragino Sans"/>
+              </a:rPr>
+              <a:t>最新成果 — 実績とUCの断面比較</a:t>
+            </a:r>
+          </a:p>
+        </p:txBody>
+      </p:sp>
+      <p:sp>
+        <p:nvSpPr>
+          <p:cNvPr id="4" name="TextBox 3"/>
+          <p:cNvSpPr txBox="1"/>
+          <p:nvPr/>
+        </p:nvSpPr>
+        <p:spPr>
+          <a:xfrm>
+            <a:off x="548640" y="685800"/>
+            <a:ext cx="10972800" cy="914400"/>
+          </a:xfrm>
+          <a:prstGeom prst="rect">
+            <a:avLst/>
+          </a:prstGeom>
+          <a:noFill/>
+        </p:spPr>
+        <p:txBody>
+          <a:bodyPr wrap="square">
+            <a:spAutoFit/>
+          </a:bodyPr>
+          <a:lstStyle/>
+          <a:p>
+            <a:pPr algn="l">
+              <a:lnSpc>
+                <a:spcPct val="125000"/>
+              </a:lnSpc>
+            </a:pPr>
+            <a:r>
+              <a:rPr sz="2700" b="1">
+                <a:solidFill>
+                  <a:srgbClr val="E9EDF2"/>
+                </a:solidFill>
+                <a:latin typeface="Hiragino Sans"/>
+              </a:rPr>
+              <a:t>実績需要断面 vs UC計画断面 — ±50MWで84.3%が一致</a:t>
+            </a:r>
+          </a:p>
+          <a:p>
+            <a:pPr algn="l">
+              <a:lnSpc>
+                <a:spcPct val="125000"/>
+              </a:lnSpc>
+            </a:pPr>
+            <a:r>
+              <a:rPr sz="1400" b="0">
+                <a:solidFill>
+                  <a:srgbClr val="8FA0B2"/>
+                </a:solidFill>
+                <a:latin typeface="Hiragino Sans"/>
+              </a:rPr>
+              <a:t>2026-08-17実績(でんき予報7エリア×24h)との差分モード(緑=概ね一致)</a:t>
+            </a:r>
+          </a:p>
+        </p:txBody>
+      </p:sp>
+      <p:pic>
+        <p:nvPicPr>
+          <p:cNvPr id="5" name="Picture 4" descr="diffdemo_slide.jpg"/>
+          <p:cNvPicPr>
+            <a:picLocks noChangeAspect="1"/>
+          </p:cNvPicPr>
+          <p:nvPr/>
+        </p:nvPicPr>
+        <p:blipFill>
+          <a:blip r:embed="rId2"/>
+          <a:stretch>
+            <a:fillRect/>
+          </a:stretch>
+        </p:blipFill>
+        <p:spPr>
+          <a:xfrm>
+            <a:off x="548640" y="1691640"/>
+            <a:ext cx="7223760" cy="4901837"/>
+          </a:xfrm>
+          <a:prstGeom prst="rect">
+            <a:avLst/>
+          </a:prstGeom>
+        </p:spPr>
+      </p:pic>
+      <p:sp>
+        <p:nvSpPr>
+          <p:cNvPr id="6" name="TextBox 5"/>
+          <p:cNvSpPr txBox="1"/>
+          <p:nvPr/>
+        </p:nvSpPr>
+        <p:spPr>
+          <a:xfrm>
+            <a:off x="7955279" y="1920240"/>
+            <a:ext cx="3840480" cy="3657600"/>
+          </a:xfrm>
+          <a:prstGeom prst="rect">
+            <a:avLst/>
+          </a:prstGeom>
+          <a:noFill/>
+        </p:spPr>
+        <p:txBody>
+          <a:bodyPr wrap="square">
+            <a:spAutoFit/>
+          </a:bodyPr>
+          <a:lstStyle/>
+          <a:p>
+            <a:pPr>
+              <a:lnSpc>
+                <a:spcPct val="130000"/>
+              </a:lnSpc>
+            </a:pPr>
+            <a:r>
+              <a:rPr sz="1400">
+                <a:solidFill>
+                  <a:srgbClr val="E9EDF2"/>
+                </a:solidFill>
+                <a:latin typeface="Hiragino Sans"/>
+              </a:rPr>
+              <a:t>・日付セレクタで実績日を選択・UCと切替比較</a:t>
+            </a:r>
+          </a:p>
+          <a:p>
+            <a:pPr>
+              <a:lnSpc>
+                <a:spcPct val="130000"/>
+              </a:lnSpc>
+            </a:pPr>
+            <a:r>
+              <a:rPr sz="1400">
+                <a:solidFill>
+                  <a:srgbClr val="E9EDF2"/>
+                </a:solidFill>
+                <a:latin typeface="Hiragino Sans"/>
+              </a:rPr>
+              <a:t>・差分=赤:実績&gt;UC・青:実績&lt;UC・緑:±許容内</a:t>
+            </a:r>
+          </a:p>
+          <a:p>
+            <a:pPr>
+              <a:lnSpc>
+                <a:spcPct val="130000"/>
+              </a:lnSpc>
+            </a:pPr>
+            <a:r>
+              <a:rPr sz="1400">
+                <a:solidFill>
+                  <a:srgbClr val="E9EDF2"/>
+                </a:solidFill>
+                <a:latin typeface="Hiragino Sans"/>
+              </a:rPr>
+              <a:t>・±50MW以内: 84.3%(12,978/15,403線)</a:t>
+            </a:r>
+          </a:p>
+          <a:p>
+            <a:pPr>
+              <a:lnSpc>
+                <a:spcPct val="130000"/>
+              </a:lnSpc>
+            </a:pPr>
+            <a:r>
+              <a:rPr sz="1400">
+                <a:solidFill>
+                  <a:srgbClr val="E9EDF2"/>
+                </a:solidFill>
+                <a:latin typeface="Hiragino Sans"/>
+              </a:rPr>
+              <a:t>・乖離は北海道(需要差)等に局在=説明可能</a:t>
+            </a:r>
+          </a:p>
+          <a:p>
+            <a:pPr>
+              <a:lnSpc>
+                <a:spcPct val="130000"/>
+              </a:lnSpc>
+            </a:pPr>
+            <a:r>
+              <a:rPr sz="1400">
+                <a:solidFill>
+                  <a:srgbClr val="E9EDF2"/>
+                </a:solidFill>
+                <a:latin typeface="Hiragino Sans"/>
+              </a:rPr>
+              <a:t>・一致率は許容値(±10〜200MW)と時刻で即時更新</a:t>
+            </a:r>
+          </a:p>
+        </p:txBody>
+      </p:sp>
+      <p:sp>
+        <p:nvSpPr>
+          <p:cNvPr id="7" name="TextBox 6"/>
+          <p:cNvSpPr txBox="1"/>
+          <p:nvPr/>
+        </p:nvSpPr>
+        <p:spPr>
+          <a:xfrm>
+            <a:off x="548640" y="6419088"/>
+            <a:ext cx="11155680" cy="365760"/>
+          </a:xfrm>
+          <a:prstGeom prst="rect">
+            <a:avLst/>
+          </a:prstGeom>
+          <a:noFill/>
+        </p:spPr>
+        <p:txBody>
+          <a:bodyPr wrap="square">
+            <a:spAutoFit/>
+          </a:bodyPr>
+          <a:lstStyle/>
+          <a:p>
+            <a:pPr algn="l">
+              <a:lnSpc>
+                <a:spcPct val="125000"/>
+              </a:lnSpc>
+            </a:pPr>
+            <a:r>
+              <a:rPr sz="1000" b="0">
+                <a:solidFill>
+                  <a:srgbClr val="8FA0B2"/>
+                </a:solidFill>
+                <a:latin typeface="Hiragino Sans"/>
+              </a:rPr>
+              <a:t>21 / 21   export_day_flows.py — 24時刻×4島 全収束</a:t>
             </a:r>
           </a:p>
         </p:txBody>
@@ -9488,7 +9811,7 @@
                 </a:solidFill>
                 <a:latin typeface="Hiragino Sans"/>
               </a:rPr>
-              <a:t>03 / 20   検証4点セット</a:t>
+              <a:t>03 / 21   検証4点セット</a:t>
             </a:r>
           </a:p>
         </p:txBody>
@@ -9851,7 +10174,7 @@
                 </a:solidFill>
                 <a:latin typeface="Hiragino Sans"/>
               </a:rPr>
-              <a:t>04 / 20   観測=observed層としてderived(解析値)と分離管理</a:t>
+              <a:t>04 / 21   観測=observed層としてderived(解析値)と分離管理</a:t>
             </a:r>
           </a:p>
         </p:txBody>
@@ -10322,7 +10645,7 @@
                 </a:solidFill>
                 <a:latin typeface="Hiragino Sans"/>
               </a:rPr>
-              <a:t>05 / 20   gen_grid_strength_map.py — 機械はG表(号機×型式別典型値)から</a:t>
+              <a:t>05 / 21   gen_grid_strength_map.py — 機械はG表(号機×型式別典型値)から</a:t>
             </a:r>
           </a:p>
         </p:txBody>
@@ -10628,7 +10951,7 @@
                 </a:solidFill>
                 <a:latin typeface="Hiragino Sans"/>
               </a:rPr>
-              <a:t>06 / 20   初回の非物理値(119GVA)は出荷Ybusの単位表記バグを検算で発見→v5.0.1修正</a:t>
+              <a:t>06 / 21   初回の非物理値(119GVA)は出荷Ybusの単位表記バグを検算で発見→v5.0.1修正</a:t>
             </a:r>
           </a:p>
         </p:txBody>
@@ -11093,7 +11416,7 @@
                 </a:solidFill>
                 <a:latin typeface="Hiragino Sans"/>
               </a:rPr>
-              <a:t>07 / 20   src/dynamics/machine_agg.py</a:t>
+              <a:t>07 / 21   src/dynamics/machine_agg.py</a:t>
             </a:r>
           </a:p>
         </p:txBody>
@@ -11383,7 +11706,7 @@
                 </a:solidFill>
                 <a:latin typeface="Hiragino Sans"/>
               </a:rPr>
-              <a:t>08 / 20   gen_swing_map.py — 運転点は本番前処理フルセット(介入#19/#20/#24/#26既定込み)</a:t>
+              <a:t>08 / 21   gen_swing_map.py — 運転点は本番前処理フルセット(介入#19/#20/#24/#26既定込み)</a:t>
             </a:r>
           </a:p>
         </p:txBody>
@@ -11707,7 +12030,7 @@
                 </a:solidFill>
                 <a:latin typeface="Hiragino Sans"/>
               </a:rPr>
-              <a:t>09 / 20   uc_pv_compare.py → pv_dynamics_compare.py(容量比例ブリッジ・開示済)</a:t>
+              <a:t>09 / 21   uc_pv_compare.py → pv_dynamics_compare.py(容量比例ブリッジ・開示済)</a:t>
             </a:r>
           </a:p>
         </p:txBody>
